--- a/archive/week2-slides-old/2주차_OPF_평가_발표.pptx
+++ b/archive/week2-slides-old/2주차_OPF_평가_발표.pptx
@@ -12015,7 +12015,7 @@
                 <a:ea typeface="Malgun Gothic" pitchFamily="34" charset="-122"/>
                 <a:cs typeface="Malgun Gothic" pitchFamily="34" charset="-120"/>
               </a:rPr>
-              <a:t>F2는 OPF 평가 하니스가 산출하는 지표 (metrics 키 detection.span.f2) · 가중 방향은 임민아 수석 지시 반영</a:t>
+              <a:t>F2는 OPF 평가 하니스가 산출하는 지표 (metrics 키 detection.span.f2) · 가중 방향은 직속 담당 수석 지시 반영</a:t>
             </a:r>
             <a:endParaRPr lang="en-US" sz="800" dirty="0"/>
           </a:p>
